--- a/examples/italy_progress_report/preview_replace_template.pptx
+++ b/examples/italy_progress_report/preview_replace_template.pptx
@@ -28056,9 +28056,56 @@
           <a:prstGeom prst="rect">
             <a:avLst/>
           </a:prstGeom>
-          <a:noFill/>
+          <a:solidFill>
+            <a:srgbClr val="FFFFFF"/>
+          </a:solidFill>
           <a:ln>
-            <a:noFill/>
+            <a:solidFill>
+              <a:srgbClr val="E6EAF0"/>
+            </a:solidFill>
+          </a:ln>
+        </p:spPr>
+        <p:style>
+          <a:lnRef idx="1">
+            <a:schemeClr val="accent1"/>
+          </a:lnRef>
+          <a:fillRef idx="3">
+            <a:schemeClr val="accent1"/>
+          </a:fillRef>
+          <a:effectRef idx="2">
+            <a:schemeClr val="accent1"/>
+          </a:effectRef>
+          <a:fontRef idx="minor">
+            <a:schemeClr val="lt1"/>
+          </a:fontRef>
+        </p:style>
+        <p:txBody>
+          <a:bodyPr rtlCol="0" anchor="ctr"/>
+          <a:lstStyle/>
+          <a:p/>
+        </p:txBody>
+      </p:sp>
+      <p:sp>
+        <p:nvSpPr>
+          <p:cNvPr id="19" name="top_issues.cards.preview.strip"/>
+          <p:cNvSpPr/>
+          <p:nvPr/>
+        </p:nvSpPr>
+        <p:spPr>
+          <a:xfrm>
+            <a:off x="701102" y="1179536"/>
+            <a:ext cx="73152" cy="1578627"/>
+          </a:xfrm>
+          <a:prstGeom prst="rect">
+            <a:avLst/>
+          </a:prstGeom>
+          <a:solidFill>
+            <a:srgbClr val="D64545"/>
+          </a:solidFill>
+          <a:ln>
+            <a:solidFill>
+              <a:srgbClr val="D64545"/>
+            </a:solidFill>
           </a:ln>
         </p:spPr>
         <p:style>
@@ -28079,8 +28126,142 @@
           <a:bodyPr rtlCol="0" anchor="ctr"/>
           <a:lstStyle/>
           <a:p>
+            <a:pPr algn="ctr"/>
+          </a:p>
+        </p:txBody>
+      </p:sp>
+      <p:sp>
+        <p:nvSpPr>
+          <p:cNvPr id="20" name="top_issues.cards.preview.severity"/>
+          <p:cNvSpPr txBox="1"/>
+          <p:nvPr/>
+        </p:nvSpPr>
+        <p:spPr>
+          <a:xfrm>
+            <a:off x="883982" y="1432116"/>
+            <a:ext cx="640080" cy="568305"/>
+          </a:xfrm>
+          <a:prstGeom prst="rect">
+            <a:avLst/>
+          </a:prstGeom>
+          <a:noFill/>
+        </p:spPr>
+        <p:txBody>
+          <a:bodyPr wrap="none" lIns="0" rIns="0" tIns="0" bIns="0">
+            <a:spAutoFit/>
+          </a:bodyPr>
+          <a:lstStyle/>
+          <a:p>
             <a:r>
-              <a:t>top issues anchor</a:t>
+              <a:rPr sz="1800" b="1">
+                <a:solidFill>
+                  <a:srgbClr val="D64545"/>
+                </a:solidFill>
+                <a:latin typeface="Microsoft YaHei"/>
+              </a:rPr>
+              <a:t>紧急</a:t>
+            </a:r>
+          </a:p>
+        </p:txBody>
+      </p:sp>
+      <p:sp>
+        <p:nvSpPr>
+          <p:cNvPr id="21" name="top_issues.cards.preview.description"/>
+          <p:cNvSpPr txBox="1"/>
+          <p:nvPr/>
+        </p:nvSpPr>
+        <p:spPr>
+          <a:xfrm>
+            <a:off x="1524062" y="1368971"/>
+            <a:ext cx="9735312" cy="410443"/>
+          </a:xfrm>
+          <a:prstGeom prst="rect">
+            <a:avLst/>
+          </a:prstGeom>
+          <a:noFill/>
+        </p:spPr>
+        <p:txBody>
+          <a:bodyPr wrap="none" lIns="0" rIns="0" tIns="0" bIns="0">
+            <a:spAutoFit/>
+          </a:bodyPr>
+          <a:lstStyle/>
+          <a:p>
+            <a:r>
+              <a:rPr sz="1300" b="1">
+                <a:solidFill>
+                  <a:srgbClr val="0052CC"/>
+                </a:solidFill>
+                <a:latin typeface="Microsoft YaHei"/>
+              </a:rPr>
+              <a:t>问题描述：项目开工25天后，仍未发送开工报告</a:t>
+            </a:r>
+          </a:p>
+        </p:txBody>
+      </p:sp>
+      <p:sp>
+        <p:nvSpPr>
+          <p:cNvPr id="22" name="top_issues.cards.preview.action"/>
+          <p:cNvSpPr txBox="1"/>
+          <p:nvPr/>
+        </p:nvSpPr>
+        <p:spPr>
+          <a:xfrm>
+            <a:off x="1524062" y="1842559"/>
+            <a:ext cx="9735312" cy="378870"/>
+          </a:xfrm>
+          <a:prstGeom prst="rect">
+            <a:avLst/>
+          </a:prstGeom>
+          <a:noFill/>
+        </p:spPr>
+        <p:txBody>
+          <a:bodyPr wrap="none" lIns="0" rIns="0" tIns="0" bIns="0">
+            <a:spAutoFit/>
+          </a:bodyPr>
+          <a:lstStyle/>
+          <a:p>
+            <a:r>
+              <a:rPr sz="1300" b="1">
+                <a:solidFill>
+                  <a:srgbClr val="0052CC"/>
+                </a:solidFill>
+                <a:latin typeface="Microsoft YaHei"/>
+              </a:rPr>
+              <a:t>解决措施与进展：待补充处理措施</a:t>
+            </a:r>
+          </a:p>
+        </p:txBody>
+      </p:sp>
+      <p:sp>
+        <p:nvSpPr>
+          <p:cNvPr id="23" name="top_issues.cards.preview.meta"/>
+          <p:cNvSpPr txBox="1"/>
+          <p:nvPr/>
+        </p:nvSpPr>
+        <p:spPr>
+          <a:xfrm>
+            <a:off x="1524062" y="2284574"/>
+            <a:ext cx="9735312" cy="347297"/>
+          </a:xfrm>
+          <a:prstGeom prst="rect">
+            <a:avLst/>
+          </a:prstGeom>
+          <a:noFill/>
+        </p:spPr>
+        <p:txBody>
+          <a:bodyPr wrap="none" lIns="0" rIns="0" tIns="0" bIns="0">
+            <a:spAutoFit/>
+          </a:bodyPr>
+          <a:lstStyle/>
+          <a:p>
+            <a:r>
+              <a:rPr sz="1200" b="0">
+                <a:solidFill>
+                  <a:srgbClr val="333333"/>
+                </a:solidFill>
+                <a:latin typeface="Microsoft YaHei"/>
+              </a:rPr>
+              <a:t>责任人：暂未分配   |  状态：处理中  | 计划解决时间：2026-06-24</a:t>
             </a:r>
           </a:p>
         </p:txBody>

--- a/examples/italy_progress_report/preview_replace_template.pptx
+++ b/examples/italy_progress_report/preview_replace_template.pptx
@@ -28191,9 +28191,16 @@
                 <a:solidFill>
                   <a:srgbClr val="0052CC"/>
                 </a:solidFill>
-                <a:latin typeface="Microsoft YaHei"/>
               </a:rPr>
-              <a:t>问题描述：项目开工25天后，仍未发送开工报告</a:t>
+              <a:t>问题描述：</a:t>
+            </a:r>
+            <a:r>
+              <a:rPr sz="1300" b="0">
+                <a:solidFill>
+                  <a:srgbClr val="333333"/>
+                </a:solidFill>
+              </a:rPr>
+              <a:t>项目开工25天后，仍未发送开工报告</a:t>
             </a:r>
           </a:p>
         </p:txBody>
@@ -28225,9 +28232,16 @@
                 <a:solidFill>
                   <a:srgbClr val="0052CC"/>
                 </a:solidFill>
-                <a:latin typeface="Microsoft YaHei"/>
               </a:rPr>
-              <a:t>解决措施与进展：待补充处理措施</a:t>
+              <a:t>解决措施与进展：</a:t>
+            </a:r>
+            <a:r>
+              <a:rPr sz="1300" b="0">
+                <a:solidFill>
+                  <a:srgbClr val="333333"/>
+                </a:solidFill>
+              </a:rPr>
+              <a:t>待补充处理措施</a:t>
             </a:r>
           </a:p>
         </p:txBody>
